--- a/Configurable_Static_Type_Checking_for_Forth_modern.pptx
+++ b/Configurable_Static_Type_Checking_for_Forth_modern.pptx
@@ -1165,7 +1165,7 @@
           <a:p>
             <a:r>
               <a:rPr lang="en-US" dirty="0"/>
-              <a:t>Tested with ./run-evaluator-gforth.sh real (exit 0). The generated log contains “PEEK2 ( a-addr[1] -- X[2] X )”. Indexed wildcards make DUP and SWAP precise enough to track values rather than merely stack shape.</a:t>
+              <a:t>Tested with ./run-evaluator-gforth.sh real (exit 0). The generated log contains “PEEK2 ( a-addr -- X X )”. Indexed wildcards make DUP and SWAP precise enough to track values rather than merely stack shape.</a:t>
             </a:r>
           </a:p>
         </p:txBody>
@@ -21162,7 +21162,7 @@
                 <a:ea typeface="Cascadia Mono" pitchFamily="34" charset="-122"/>
                 <a:cs typeface="Cascadia Mono" pitchFamily="34" charset="-120"/>
               </a:rPr>
-              <a:t>PEEK2 ( a-addr[1] -- X[2] X )</a:t>
+              <a:t>PEEK2 ( a-addr -- X X )</a:t>
             </a:r>
             <a:endParaRPr lang="en-US" sz="1060" dirty="0"/>
           </a:p>
@@ -23399,7 +23399,7 @@
                 <a:ea typeface="Aptos" pitchFamily="34" charset="-122"/>
                 <a:cs typeface="Aptos" pitchFamily="34" charset="-120"/>
               </a:rPr>
-              <a:t>Only guarantees valid on every path survive.</a:t>
+              <a:t>Inputs narrow; outputs widen; shared identities alone survive.</a:t>
             </a:r>
             <a:endParaRPr lang="en-US" sz="1110" dirty="0"/>
           </a:p>
